--- a/programming_navi/docs/data-structure/06_集合管理構造/_assets/bitset.pptx
+++ b/programming_navi/docs/data-structure/06_集合管理構造/_assets/bitset.pptx
@@ -13148,28 +13148,28 @@
         <a:sysClr val="window" lastClr="FFFFFF"/>
       </a:lt1>
       <a:dk2>
-        <a:srgbClr val="1F497D"/>
+        <a:srgbClr val="013CA6"/>
       </a:dk2>
       <a:lt2>
-        <a:srgbClr val="EEECE1"/>
+        <a:srgbClr val="F3FAFE"/>
       </a:lt2>
       <a:accent1>
-        <a:srgbClr val="4F81BD"/>
+        <a:srgbClr val="013CA6"/>
       </a:accent1>
       <a:accent2>
-        <a:srgbClr val="C0504D"/>
+        <a:srgbClr val="BDE4FC"/>
       </a:accent2>
       <a:accent3>
-        <a:srgbClr val="9BBB59"/>
+        <a:srgbClr val="F3FAFE"/>
       </a:accent3>
       <a:accent4>
-        <a:srgbClr val="8064A2"/>
+        <a:srgbClr val="EBA81A"/>
       </a:accent4>
       <a:accent5>
-        <a:srgbClr val="4BACC6"/>
+        <a:srgbClr val="00B050"/>
       </a:accent5>
       <a:accent6>
-        <a:srgbClr val="F79646"/>
+        <a:srgbClr val="FFFFFF"/>
       </a:accent6>
       <a:hlink>
         <a:srgbClr val="0000FF"/>
